--- a/plantilla_hc.pptx
+++ b/plantilla_hc.pptx
@@ -2237,8 +2237,8 @@
         </p:blipFill>
         <p:spPr>
           <a:xfrm>
-            <a:off x="7112000" y="4953000"/>
-            <a:ext cx="4064000" cy="889000"/>
+            <a:off x="5842000" y="1778000"/>
+            <a:ext cx="5334000" cy="3556000"/>
           </a:xfrm>
           <a:prstGeom prst="rect">
             <a:avLst/>
@@ -11468,8 +11468,8 @@
         </p:blipFill>
         <p:spPr>
           <a:xfrm>
-            <a:off x="7112000" y="3175000"/>
-            <a:ext cx="4064000" cy="889000"/>
+            <a:off x="5842000" y="1778000"/>
+            <a:ext cx="5334000" cy="3556000"/>
           </a:xfrm>
           <a:prstGeom prst="rect">
             <a:avLst/>

--- a/plantilla_hc.pptx
+++ b/plantilla_hc.pptx
@@ -2237,8 +2237,8 @@
         </p:blipFill>
         <p:spPr>
           <a:xfrm>
-            <a:off x="5842000" y="1778000"/>
-            <a:ext cx="5334000" cy="3556000"/>
+            <a:off x="7112000" y="1905000"/>
+            <a:ext cx="4318000" cy="3302000"/>
           </a:xfrm>
           <a:prstGeom prst="rect">
             <a:avLst/>
@@ -11468,8 +11468,8 @@
         </p:blipFill>
         <p:spPr>
           <a:xfrm>
-            <a:off x="5842000" y="1778000"/>
-            <a:ext cx="5334000" cy="3556000"/>
+            <a:off x="7112000" y="1905000"/>
+            <a:ext cx="4318000" cy="3302000"/>
           </a:xfrm>
           <a:prstGeom prst="rect">
             <a:avLst/>
